--- a/Aula05_Representacao_de_Processos_e_Dados/Aula05_Teoria.pptx
+++ b/Aula05_Representacao_de_Processos_e_Dados/Aula05_Teoria.pptx
@@ -2320,6 +2320,10 @@
           </a:solidFill>
           <a:ln/>
         </p:spPr>
+        <p:txBody>
+          <a:bodyPr/>
+          <a:p/>
+        </p:txBody>
       </p:sp>
       <p:sp>
         <p:nvSpPr>
@@ -2342,6 +2346,10 @@
           </a:solidFill>
           <a:ln/>
         </p:spPr>
+        <p:txBody>
+          <a:bodyPr/>
+          <a:p/>
+        </p:txBody>
       </p:sp>
       <p:sp>
         <p:nvSpPr>
@@ -2362,6 +2370,10 @@
           </a:solidFill>
           <a:ln/>
         </p:spPr>
+        <p:txBody>
+          <a:bodyPr/>
+          <a:p/>
+        </p:txBody>
       </p:sp>
       <p:pic>
         <p:nvPicPr>
@@ -2633,6 +2645,10 @@
           </a:solidFill>
           <a:ln/>
         </p:spPr>
+        <p:txBody>
+          <a:bodyPr/>
+          <a:p/>
+        </p:txBody>
       </p:sp>
       <p:sp>
         <p:nvSpPr>
@@ -2733,6 +2749,10 @@
           </a:solidFill>
           <a:ln/>
         </p:spPr>
+        <p:txBody>
+          <a:bodyPr/>
+          <a:p/>
+        </p:txBody>
       </p:sp>
       <p:sp>
         <p:nvSpPr>
@@ -2879,6 +2899,10 @@
           </a:solidFill>
           <a:ln/>
         </p:spPr>
+        <p:txBody>
+          <a:bodyPr/>
+          <a:p/>
+        </p:txBody>
       </p:sp>
       <p:sp>
         <p:nvSpPr>
@@ -3382,6 +3406,10 @@
           </a:solidFill>
           <a:ln/>
         </p:spPr>
+        <p:txBody>
+          <a:bodyPr/>
+          <a:p/>
+        </p:txBody>
       </p:sp>
       <p:sp>
         <p:nvSpPr>
@@ -3480,7 +3508,7 @@
                 <a:ea typeface="Calibri" pitchFamily="34" charset="-122"/>
                 <a:cs typeface="Calibri" pitchFamily="34" charset="-120"/>
               </a:rPr>
-              <a:t>Queiroz: representações ampliam a percepção de propriedades e relações.</a:t>
+              <a:t>Representações ampliam a percepção de propriedades e relações.</a:t>
             </a:r>
             <a:endParaRPr lang="en-US" sz="1250" dirty="0"/>
           </a:p>
@@ -3501,7 +3529,7 @@
                 <a:ea typeface="Calibri" pitchFamily="34" charset="-122"/>
                 <a:cs typeface="Calibri" pitchFamily="34" charset="-120"/>
               </a:rPr>
-              <a:t>Wessels: organizar dados é componente crítico da representação.</a:t>
+              <a:t>Organizar dados é componente crítico da representação.</a:t>
             </a:r>
             <a:endParaRPr lang="en-US" sz="1250" dirty="0"/>
           </a:p>
@@ -3522,7 +3550,7 @@
                 <a:ea typeface="Calibri" pitchFamily="34" charset="-122"/>
                 <a:cs typeface="Calibri" pitchFamily="34" charset="-120"/>
               </a:rPr>
-              <a:t>Relato: articular código, texto, tabela, gráfico e interpretação.</a:t>
+              <a:t>Articular código, texto, tabela, gráfico e interpretação.</a:t>
             </a:r>
             <a:endParaRPr lang="en-US" sz="1250" dirty="0"/>
           </a:p>
@@ -3549,6 +3577,10 @@
           </a:solidFill>
           <a:ln/>
         </p:spPr>
+        <p:txBody>
+          <a:bodyPr/>
+          <a:p/>
+        </p:txBody>
       </p:sp>
       <p:sp>
         <p:nvSpPr>
@@ -3816,6 +3848,10 @@
           </a:solidFill>
           <a:ln/>
         </p:spPr>
+        <p:txBody>
+          <a:bodyPr/>
+          <a:p/>
+        </p:txBody>
       </p:sp>
       <p:sp>
         <p:nvSpPr>
@@ -3916,6 +3952,10 @@
           </a:solidFill>
           <a:ln/>
         </p:spPr>
+        <p:txBody>
+          <a:bodyPr/>
+          <a:p/>
+        </p:txBody>
       </p:sp>
       <p:sp>
         <p:nvSpPr>
@@ -4062,6 +4102,10 @@
           </a:solidFill>
           <a:ln/>
         </p:spPr>
+        <p:txBody>
+          <a:bodyPr/>
+          <a:p/>
+        </p:txBody>
       </p:sp>
       <p:sp>
         <p:nvSpPr>
@@ -4503,6 +4547,10 @@
           </a:solidFill>
           <a:ln/>
         </p:spPr>
+        <p:txBody>
+          <a:bodyPr/>
+          <a:p/>
+        </p:txBody>
       </p:sp>
       <p:sp>
         <p:nvSpPr>
@@ -4601,7 +4649,7 @@
                 <a:ea typeface="Calibri" pitchFamily="34" charset="-122"/>
                 <a:cs typeface="Calibri" pitchFamily="34" charset="-120"/>
               </a:rPr>
-              <a:t>Queiroz: múltiplas expressões exibem aspectos distintos do mesmo conceito.</a:t>
+              <a:t>Múltiplas expressões exibem aspectos distintos do mesmo conceito.</a:t>
             </a:r>
             <a:endParaRPr lang="en-US" sz="1250" dirty="0"/>
           </a:p>
@@ -4622,7 +4670,7 @@
                 <a:ea typeface="Calibri" pitchFamily="34" charset="-122"/>
                 <a:cs typeface="Calibri" pitchFamily="34" charset="-120"/>
               </a:rPr>
-              <a:t>Relato: permitir manipulação de parâmetros e comparação de estados.</a:t>
+              <a:t>Permitir manipulação de parâmetros e comparação de estados.</a:t>
             </a:r>
             <a:endParaRPr lang="en-US" sz="1250" dirty="0"/>
           </a:p>
@@ -4643,7 +4691,7 @@
                 <a:ea typeface="Calibri" pitchFamily="34" charset="-122"/>
                 <a:cs typeface="Calibri" pitchFamily="34" charset="-120"/>
               </a:rPr>
-              <a:t>Wessels: transnumeração torna dados interpretáveis em nova forma.</a:t>
+              <a:t>Transnumeração torna dados interpretáveis em nova forma.</a:t>
             </a:r>
             <a:endParaRPr lang="en-US" sz="1250" dirty="0"/>
           </a:p>
@@ -4670,6 +4718,10 @@
           </a:solidFill>
           <a:ln/>
         </p:spPr>
+        <p:txBody>
+          <a:bodyPr/>
+          <a:p/>
+        </p:txBody>
       </p:sp>
       <p:sp>
         <p:nvSpPr>
@@ -4937,6 +4989,10 @@
           </a:solidFill>
           <a:ln/>
         </p:spPr>
+        <p:txBody>
+          <a:bodyPr/>
+          <a:p/>
+        </p:txBody>
       </p:sp>
       <p:sp>
         <p:nvSpPr>
@@ -5037,6 +5093,10 @@
           </a:solidFill>
           <a:ln/>
         </p:spPr>
+        <p:txBody>
+          <a:bodyPr/>
+          <a:p/>
+        </p:txBody>
       </p:sp>
       <p:sp>
         <p:nvSpPr>
@@ -5183,6 +5243,10 @@
           </a:solidFill>
           <a:ln/>
         </p:spPr>
+        <p:txBody>
+          <a:bodyPr/>
+          <a:p/>
+        </p:txBody>
       </p:sp>
       <p:sp>
         <p:nvSpPr>
@@ -6043,6 +6107,10 @@
           </a:solidFill>
           <a:ln/>
         </p:spPr>
+        <p:txBody>
+          <a:bodyPr/>
+          <a:p/>
+        </p:txBody>
       </p:sp>
       <p:sp>
         <p:nvSpPr>
@@ -6141,7 +6209,7 @@
                 <a:ea typeface="Calibri" pitchFamily="34" charset="-122"/>
                 <a:cs typeface="Calibri" pitchFamily="34" charset="-120"/>
               </a:rPr>
-              <a:t>Wessels: transnumeração torna dados interpretáveis em nova forma.</a:t>
+              <a:t>Transnumeração torna dados interpretáveis em nova forma.</a:t>
             </a:r>
             <a:endParaRPr lang="en-US" sz="1250" dirty="0"/>
           </a:p>
@@ -6162,7 +6230,7 @@
                 <a:ea typeface="Calibri" pitchFamily="34" charset="-122"/>
                 <a:cs typeface="Calibri" pitchFamily="34" charset="-120"/>
               </a:rPr>
-              <a:t>Queiroz: representações ampliam a percepção de propriedades e relações.</a:t>
+              <a:t>Representações ampliam a percepção de propriedades e relações.</a:t>
             </a:r>
             <a:endParaRPr lang="en-US" sz="1250" dirty="0"/>
           </a:p>
@@ -6183,7 +6251,7 @@
                 <a:ea typeface="Calibri" pitchFamily="34" charset="-122"/>
                 <a:cs typeface="Calibri" pitchFamily="34" charset="-120"/>
               </a:rPr>
-              <a:t>Relato: articular código, texto, tabela, gráfico e interpretação.</a:t>
+              <a:t>Articular código, texto, tabela, gráfico e interpretação.</a:t>
             </a:r>
             <a:endParaRPr lang="en-US" sz="1250" dirty="0"/>
           </a:p>
@@ -6210,6 +6278,10 @@
           </a:solidFill>
           <a:ln/>
         </p:spPr>
+        <p:txBody>
+          <a:bodyPr/>
+          <a:p/>
+        </p:txBody>
       </p:sp>
       <p:sp>
         <p:nvSpPr>
@@ -6477,6 +6549,10 @@
           </a:solidFill>
           <a:ln/>
         </p:spPr>
+        <p:txBody>
+          <a:bodyPr/>
+          <a:p/>
+        </p:txBody>
       </p:sp>
       <p:sp>
         <p:nvSpPr>
@@ -6577,6 +6653,10 @@
           </a:solidFill>
           <a:ln/>
         </p:spPr>
+        <p:txBody>
+          <a:bodyPr/>
+          <a:p/>
+        </p:txBody>
       </p:sp>
       <p:sp>
         <p:nvSpPr>
@@ -6723,6 +6803,10 @@
           </a:solidFill>
           <a:ln/>
         </p:spPr>
+        <p:txBody>
+          <a:bodyPr/>
+          <a:p/>
+        </p:txBody>
       </p:sp>
       <p:sp>
         <p:nvSpPr>
@@ -7215,6 +7299,10 @@
           </a:solidFill>
           <a:ln/>
         </p:spPr>
+        <p:txBody>
+          <a:bodyPr/>
+          <a:p/>
+        </p:txBody>
       </p:sp>
       <p:sp>
         <p:nvSpPr>
@@ -7313,7 +7401,7 @@
                 <a:ea typeface="Calibri" pitchFamily="34" charset="-122"/>
                 <a:cs typeface="Calibri" pitchFamily="34" charset="-120"/>
               </a:rPr>
-              <a:t>Queiroz: a análise qualitativa observa invariantes e relações mobilizadas na ação.</a:t>
+              <a:t>A análise qualitativa observa invariantes e relações mobilizadas na ação.</a:t>
             </a:r>
             <a:endParaRPr lang="en-US" sz="1250" dirty="0"/>
           </a:p>
@@ -7334,7 +7422,7 @@
                 <a:ea typeface="Calibri" pitchFamily="34" charset="-122"/>
                 <a:cs typeface="Calibri" pitchFamily="34" charset="-120"/>
               </a:rPr>
-              <a:t>Wessels: listas, tabelas e gráficos comunicam histórias diferentes dos dados.</a:t>
+              <a:t>Listas, tabelas e gráficos comunicam histórias diferentes dos dados.</a:t>
             </a:r>
             <a:endParaRPr lang="en-US" sz="1250" dirty="0"/>
           </a:p>
@@ -7355,7 +7443,7 @@
                 <a:ea typeface="Calibri" pitchFamily="34" charset="-122"/>
                 <a:cs typeface="Calibri" pitchFamily="34" charset="-120"/>
               </a:rPr>
-              <a:t>Relato: solicitar explicação do raciocínio desenvolvido.</a:t>
+              <a:t>Solicitar explicação do raciocínio desenvolvido.</a:t>
             </a:r>
             <a:endParaRPr lang="en-US" sz="1250" dirty="0"/>
           </a:p>
@@ -7382,6 +7470,10 @@
           </a:solidFill>
           <a:ln/>
         </p:spPr>
+        <p:txBody>
+          <a:bodyPr/>
+          <a:p/>
+        </p:txBody>
       </p:sp>
       <p:sp>
         <p:nvSpPr>
@@ -7649,6 +7741,10 @@
           </a:solidFill>
           <a:ln/>
         </p:spPr>
+        <p:txBody>
+          <a:bodyPr/>
+          <a:p/>
+        </p:txBody>
       </p:sp>
       <p:sp>
         <p:nvSpPr>
@@ -7749,6 +7845,10 @@
           </a:solidFill>
           <a:ln/>
         </p:spPr>
+        <p:txBody>
+          <a:bodyPr/>
+          <a:p/>
+        </p:txBody>
       </p:sp>
       <p:sp>
         <p:nvSpPr>
@@ -7895,6 +7995,10 @@
           </a:solidFill>
           <a:ln/>
         </p:spPr>
+        <p:txBody>
+          <a:bodyPr/>
+          <a:p/>
+        </p:txBody>
       </p:sp>
       <p:sp>
         <p:nvSpPr>
@@ -8880,6 +8984,10 @@
           </a:solidFill>
           <a:ln/>
         </p:spPr>
+        <p:txBody>
+          <a:bodyPr/>
+          <a:p/>
+        </p:txBody>
       </p:sp>
       <p:sp>
         <p:nvSpPr>
@@ -8978,7 +9086,7 @@
                 <a:ea typeface="Calibri" pitchFamily="34" charset="-122"/>
                 <a:cs typeface="Calibri" pitchFamily="34" charset="-120"/>
               </a:rPr>
-              <a:t>Wessels: listas, tabelas e gráficos comunicam histórias diferentes dos dados.</a:t>
+              <a:t>Listas, tabelas e gráficos comunicam histórias diferentes dos dados.</a:t>
             </a:r>
             <a:endParaRPr lang="en-US" sz="1250" dirty="0"/>
           </a:p>
@@ -8999,7 +9107,7 @@
                 <a:ea typeface="Calibri" pitchFamily="34" charset="-122"/>
                 <a:cs typeface="Calibri" pitchFamily="34" charset="-120"/>
               </a:rPr>
-              <a:t>Queiroz: múltiplas expressões exibem aspectos distintos do mesmo conceito.</a:t>
+              <a:t>Múltiplas expressões exibem aspectos distintos do mesmo conceito.</a:t>
             </a:r>
             <a:endParaRPr lang="en-US" sz="1250" dirty="0"/>
           </a:p>
@@ -9020,7 +9128,7 @@
                 <a:ea typeface="Calibri" pitchFamily="34" charset="-122"/>
                 <a:cs typeface="Calibri" pitchFamily="34" charset="-120"/>
               </a:rPr>
-              <a:t>Relato: articular código, texto, tabela, gráfico e interpretação.</a:t>
+              <a:t>Articular código, texto, tabela, gráfico e interpretação.</a:t>
             </a:r>
             <a:endParaRPr lang="en-US" sz="1250" dirty="0"/>
           </a:p>
@@ -9047,6 +9155,10 @@
           </a:solidFill>
           <a:ln/>
         </p:spPr>
+        <p:txBody>
+          <a:bodyPr/>
+          <a:p/>
+        </p:txBody>
       </p:sp>
       <p:sp>
         <p:nvSpPr>
@@ -9314,6 +9426,10 @@
           </a:solidFill>
           <a:ln/>
         </p:spPr>
+        <p:txBody>
+          <a:bodyPr/>
+          <a:p/>
+        </p:txBody>
       </p:sp>
       <p:sp>
         <p:nvSpPr>
@@ -9414,6 +9530,10 @@
           </a:solidFill>
           <a:ln/>
         </p:spPr>
+        <p:txBody>
+          <a:bodyPr/>
+          <a:p/>
+        </p:txBody>
       </p:sp>
       <p:sp>
         <p:nvSpPr>
@@ -9560,6 +9680,10 @@
           </a:solidFill>
           <a:ln/>
         </p:spPr>
+        <p:txBody>
+          <a:bodyPr/>
+          <a:p/>
+        </p:txBody>
       </p:sp>
       <p:sp>
         <p:nvSpPr>
@@ -10103,6 +10227,10 @@
           </a:solidFill>
           <a:ln/>
         </p:spPr>
+        <p:txBody>
+          <a:bodyPr/>
+          <a:p/>
+        </p:txBody>
       </p:sp>
       <p:sp>
         <p:nvSpPr>
@@ -10201,7 +10329,7 @@
                 <a:ea typeface="Calibri" pitchFamily="34" charset="-122"/>
                 <a:cs typeface="Calibri" pitchFamily="34" charset="-120"/>
               </a:rPr>
-              <a:t>Relato: explicitar variáveis, relações e restrições.</a:t>
+              <a:t>Explicitar variáveis, relações e restrições.</a:t>
             </a:r>
             <a:endParaRPr lang="en-US" sz="1250" dirty="0"/>
           </a:p>
@@ -10222,7 +10350,7 @@
                 <a:ea typeface="Calibri" pitchFamily="34" charset="-122"/>
                 <a:cs typeface="Calibri" pitchFamily="34" charset="-120"/>
               </a:rPr>
-              <a:t>Queiroz: a tarefa deve articular dimensão material e cognitiva.</a:t>
+              <a:t>A tarefa deve articular dimensão material e cognitiva.</a:t>
             </a:r>
             <a:endParaRPr lang="en-US" sz="1250" dirty="0"/>
           </a:p>
@@ -10243,7 +10371,7 @@
                 <a:ea typeface="Calibri" pitchFamily="34" charset="-122"/>
                 <a:cs typeface="Calibri" pitchFamily="34" charset="-120"/>
               </a:rPr>
-              <a:t>Wessels: níveis SOLO ajudam a observar respostas de menor a maior integração.</a:t>
+              <a:t>Níveis SOLO ajudam a observar respostas de menor a maior integração.</a:t>
             </a:r>
             <a:endParaRPr lang="en-US" sz="1250" dirty="0"/>
           </a:p>
@@ -10270,6 +10398,10 @@
           </a:solidFill>
           <a:ln/>
         </p:spPr>
+        <p:txBody>
+          <a:bodyPr/>
+          <a:p/>
+        </p:txBody>
       </p:sp>
       <p:sp>
         <p:nvSpPr>
@@ -10537,6 +10669,10 @@
           </a:solidFill>
           <a:ln/>
         </p:spPr>
+        <p:txBody>
+          <a:bodyPr/>
+          <a:p/>
+        </p:txBody>
       </p:sp>
       <p:sp>
         <p:nvSpPr>
@@ -10637,6 +10773,10 @@
           </a:solidFill>
           <a:ln/>
         </p:spPr>
+        <p:txBody>
+          <a:bodyPr/>
+          <a:p/>
+        </p:txBody>
       </p:sp>
       <p:sp>
         <p:nvSpPr>
@@ -10783,6 +10923,10 @@
           </a:solidFill>
           <a:ln/>
         </p:spPr>
+        <p:txBody>
+          <a:bodyPr/>
+          <a:p/>
+        </p:txBody>
       </p:sp>
       <p:sp>
         <p:nvSpPr>
@@ -11093,6 +11237,10 @@
           </a:solidFill>
           <a:ln/>
         </p:spPr>
+        <p:txBody>
+          <a:bodyPr/>
+          <a:p/>
+        </p:txBody>
       </p:sp>
       <p:sp>
         <p:nvSpPr>
@@ -11191,7 +11339,7 @@
                 <a:ea typeface="Calibri" pitchFamily="34" charset="-122"/>
                 <a:cs typeface="Calibri" pitchFamily="34" charset="-120"/>
               </a:rPr>
-              <a:t>Wessels: múltiplas representações indicam modelagem mais bem-sucedida.</a:t>
+              <a:t>Múltiplas representações indicam modelagem mais bem-sucedida.</a:t>
             </a:r>
             <a:endParaRPr lang="en-US" sz="1250" dirty="0"/>
           </a:p>
@@ -11212,7 +11360,7 @@
                 <a:ea typeface="Calibri" pitchFamily="34" charset="-122"/>
                 <a:cs typeface="Calibri" pitchFamily="34" charset="-120"/>
               </a:rPr>
-              <a:t>Queiroz: representações ampliam a percepção de propriedades e relações.</a:t>
+              <a:t>Representações ampliam a percepção de propriedades e relações.</a:t>
             </a:r>
             <a:endParaRPr lang="en-US" sz="1250" dirty="0"/>
           </a:p>
@@ -11233,7 +11381,7 @@
                 <a:ea typeface="Calibri" pitchFamily="34" charset="-122"/>
                 <a:cs typeface="Calibri" pitchFamily="34" charset="-120"/>
               </a:rPr>
-              <a:t>Relato: avaliar o percurso de pensamento, não apenas o código final.</a:t>
+              <a:t>Avaliar o percurso de pensamento, não apenas o código final.</a:t>
             </a:r>
             <a:endParaRPr lang="en-US" sz="1250" dirty="0"/>
           </a:p>
@@ -11260,6 +11408,10 @@
           </a:solidFill>
           <a:ln/>
         </p:spPr>
+        <p:txBody>
+          <a:bodyPr/>
+          <a:p/>
+        </p:txBody>
       </p:sp>
       <p:sp>
         <p:nvSpPr>
@@ -11568,6 +11720,10 @@
           </a:solidFill>
           <a:ln/>
         </p:spPr>
+        <p:txBody>
+          <a:bodyPr/>
+          <a:p/>
+        </p:txBody>
       </p:sp>
       <p:sp>
         <p:nvSpPr>
@@ -11606,7 +11762,7 @@
                 <a:ea typeface="Calibri" pitchFamily="34" charset="-122"/>
                 <a:cs typeface="Calibri" pitchFamily="34" charset="-120"/>
               </a:rPr>
-              <a:t>Queiroz: representações ampliam a percepção de propriedades e relações do conceito.</a:t>
+              <a:t>Representações ampliam a percepção de propriedades e relações do conceito.</a:t>
             </a:r>
             <a:endParaRPr lang="en-US" sz="1500" dirty="0"/>
           </a:p>
@@ -11675,6 +11831,10 @@
           </a:solidFill>
           <a:ln/>
         </p:spPr>
+        <p:txBody>
+          <a:bodyPr/>
+          <a:p/>
+        </p:txBody>
       </p:sp>
       <p:sp>
         <p:nvSpPr>
@@ -11695,6 +11855,10 @@
           </a:solidFill>
           <a:ln/>
         </p:spPr>
+        <p:txBody>
+          <a:bodyPr/>
+          <a:p/>
+        </p:txBody>
       </p:sp>
       <p:pic>
         <p:nvPicPr>
@@ -12007,6 +12171,10 @@
           </a:solidFill>
           <a:ln/>
         </p:spPr>
+        <p:txBody>
+          <a:bodyPr/>
+          <a:p/>
+        </p:txBody>
       </p:sp>
       <p:sp>
         <p:nvSpPr>
@@ -12027,6 +12195,10 @@
           </a:solidFill>
           <a:ln/>
         </p:spPr>
+        <p:txBody>
+          <a:bodyPr/>
+          <a:p/>
+        </p:txBody>
       </p:sp>
       <p:sp>
         <p:nvSpPr>
@@ -12130,6 +12302,10 @@
           </a:solidFill>
           <a:ln/>
         </p:spPr>
+        <p:txBody>
+          <a:bodyPr/>
+          <a:p/>
+        </p:txBody>
       </p:sp>
       <p:sp>
         <p:nvSpPr>
@@ -12150,6 +12326,10 @@
           </a:solidFill>
           <a:ln/>
         </p:spPr>
+        <p:txBody>
+          <a:bodyPr/>
+          <a:p/>
+        </p:txBody>
       </p:sp>
       <p:sp>
         <p:nvSpPr>
@@ -12253,6 +12433,10 @@
           </a:solidFill>
           <a:ln/>
         </p:spPr>
+        <p:txBody>
+          <a:bodyPr/>
+          <a:p/>
+        </p:txBody>
       </p:sp>
       <p:sp>
         <p:nvSpPr>
@@ -12273,6 +12457,10 @@
           </a:solidFill>
           <a:ln/>
         </p:spPr>
+        <p:txBody>
+          <a:bodyPr/>
+          <a:p/>
+        </p:txBody>
       </p:sp>
       <p:sp>
         <p:nvSpPr>
@@ -12376,6 +12564,10 @@
           </a:solidFill>
           <a:ln/>
         </p:spPr>
+        <p:txBody>
+          <a:bodyPr/>
+          <a:p/>
+        </p:txBody>
       </p:sp>
       <p:sp>
         <p:nvSpPr>
@@ -12396,6 +12588,10 @@
           </a:solidFill>
           <a:ln/>
         </p:spPr>
+        <p:txBody>
+          <a:bodyPr/>
+          <a:p/>
+        </p:txBody>
       </p:sp>
       <p:sp>
         <p:nvSpPr>
@@ -12499,6 +12695,10 @@
           </a:solidFill>
           <a:ln/>
         </p:spPr>
+        <p:txBody>
+          <a:bodyPr/>
+          <a:p/>
+        </p:txBody>
       </p:sp>
       <p:sp>
         <p:nvSpPr>
@@ -12519,6 +12719,10 @@
           </a:solidFill>
           <a:ln/>
         </p:spPr>
+        <p:txBody>
+          <a:bodyPr/>
+          <a:p/>
+        </p:txBody>
       </p:sp>
       <p:sp>
         <p:nvSpPr>
@@ -12622,6 +12826,10 @@
           </a:solidFill>
           <a:ln/>
         </p:spPr>
+        <p:txBody>
+          <a:bodyPr/>
+          <a:p/>
+        </p:txBody>
       </p:sp>
       <p:sp>
         <p:nvSpPr>
@@ -12642,6 +12850,10 @@
           </a:solidFill>
           <a:ln/>
         </p:spPr>
+        <p:txBody>
+          <a:bodyPr/>
+          <a:p/>
+        </p:txBody>
       </p:sp>
       <p:sp>
         <p:nvSpPr>
@@ -12972,6 +13184,10 @@
           </a:solidFill>
           <a:ln/>
         </p:spPr>
+        <p:txBody>
+          <a:bodyPr/>
+          <a:p/>
+        </p:txBody>
       </p:sp>
       <p:sp>
         <p:nvSpPr>
@@ -12992,6 +13208,10 @@
           </a:solidFill>
           <a:ln/>
         </p:spPr>
+        <p:txBody>
+          <a:bodyPr/>
+          <a:p/>
+        </p:txBody>
       </p:sp>
       <p:sp>
         <p:nvSpPr>
@@ -13156,6 +13376,10 @@
           </a:solidFill>
           <a:ln/>
         </p:spPr>
+        <p:txBody>
+          <a:bodyPr/>
+          <a:p/>
+        </p:txBody>
       </p:sp>
       <p:sp>
         <p:nvSpPr>
@@ -13176,6 +13400,10 @@
           </a:solidFill>
           <a:ln/>
         </p:spPr>
+        <p:txBody>
+          <a:bodyPr/>
+          <a:p/>
+        </p:txBody>
       </p:sp>
       <p:sp>
         <p:nvSpPr>
@@ -13292,7 +13520,7 @@
                 <a:ea typeface="Calibri" pitchFamily="34" charset="-122"/>
                 <a:cs typeface="Calibri" pitchFamily="34" charset="-120"/>
               </a:rPr>
-              <a:t>Termo de Wessels: mudar a forma de apresentação de um dado o torna interpretável de um novo jeito.</a:t>
+              <a:t>Mudar a forma de apresentação de um dado o torna interpretável de um novo jeito.</a:t>
             </a:r>
             <a:endParaRPr lang="en-US" sz="1550" dirty="0"/>
           </a:p>
@@ -13340,6 +13568,10 @@
           </a:solidFill>
           <a:ln/>
         </p:spPr>
+        <p:txBody>
+          <a:bodyPr/>
+          <a:p/>
+        </p:txBody>
       </p:sp>
       <p:sp>
         <p:nvSpPr>
@@ -13374,7 +13606,7 @@
                 <a:ea typeface="Cambria" pitchFamily="34" charset="-122"/>
                 <a:cs typeface="Cambria" pitchFamily="34" charset="-120"/>
               </a:rPr>
-              <a:t>Queiroz: representações ampliam a percepção de propriedades e relações do conceito.</a:t>
+              <a:t>Representações ampliam a percepção de propriedades e relações do conceito.</a:t>
             </a:r>
             <a:endParaRPr lang="en-US" sz="1450" dirty="0"/>
           </a:p>
@@ -13589,6 +13821,10 @@
           </a:solidFill>
           <a:ln/>
         </p:spPr>
+        <p:txBody>
+          <a:bodyPr/>
+          <a:p/>
+        </p:txBody>
       </p:sp>
       <p:sp>
         <p:nvSpPr>
@@ -13609,6 +13845,10 @@
           </a:solidFill>
           <a:ln/>
         </p:spPr>
+        <p:txBody>
+          <a:bodyPr/>
+          <a:p/>
+        </p:txBody>
       </p:sp>
       <p:sp>
         <p:nvSpPr>
@@ -13773,6 +14013,10 @@
           </a:solidFill>
           <a:ln/>
         </p:spPr>
+        <p:txBody>
+          <a:bodyPr/>
+          <a:p/>
+        </p:txBody>
       </p:sp>
       <p:sp>
         <p:nvSpPr>
@@ -13793,6 +14037,10 @@
           </a:solidFill>
           <a:ln/>
         </p:spPr>
+        <p:txBody>
+          <a:bodyPr/>
+          <a:p/>
+        </p:txBody>
       </p:sp>
       <p:sp>
         <p:nvSpPr>
@@ -13957,6 +14205,10 @@
           </a:solidFill>
           <a:ln/>
         </p:spPr>
+        <p:txBody>
+          <a:bodyPr/>
+          <a:p/>
+        </p:txBody>
       </p:sp>
       <p:sp>
         <p:nvSpPr>
@@ -14206,6 +14458,10 @@
           </a:solidFill>
           <a:ln/>
         </p:spPr>
+        <p:txBody>
+          <a:bodyPr/>
+          <a:p/>
+        </p:txBody>
       </p:sp>
       <p:sp>
         <p:nvSpPr>
@@ -14226,6 +14482,10 @@
           </a:solidFill>
           <a:ln/>
         </p:spPr>
+        <p:txBody>
+          <a:bodyPr/>
+          <a:p/>
+        </p:txBody>
       </p:sp>
       <p:sp>
         <p:nvSpPr>
@@ -14443,6 +14703,10 @@
           </a:solidFill>
           <a:ln/>
         </p:spPr>
+        <p:txBody>
+          <a:bodyPr/>
+          <a:p/>
+        </p:txBody>
       </p:sp>
       <p:sp>
         <p:nvSpPr>
@@ -14463,6 +14727,10 @@
           </a:solidFill>
           <a:ln/>
         </p:spPr>
+        <p:txBody>
+          <a:bodyPr/>
+          <a:p/>
+        </p:txBody>
       </p:sp>
       <p:sp>
         <p:nvSpPr>
@@ -14788,6 +15056,10 @@
           </a:solidFill>
           <a:ln/>
         </p:spPr>
+        <p:txBody>
+          <a:bodyPr/>
+          <a:p/>
+        </p:txBody>
       </p:sp>
       <p:sp>
         <p:nvSpPr>
@@ -14927,6 +15199,10 @@
           </a:solidFill>
           <a:ln/>
         </p:spPr>
+        <p:txBody>
+          <a:bodyPr/>
+          <a:p/>
+        </p:txBody>
       </p:sp>
       <p:sp>
         <p:nvSpPr>
@@ -15291,6 +15567,10 @@
           </a:solidFill>
           <a:ln/>
         </p:spPr>
+        <p:txBody>
+          <a:bodyPr/>
+          <a:p/>
+        </p:txBody>
       </p:sp>
       <p:sp>
         <p:nvSpPr>
@@ -15391,6 +15671,10 @@
           </a:solidFill>
           <a:ln/>
         </p:spPr>
+        <p:txBody>
+          <a:bodyPr/>
+          <a:p/>
+        </p:txBody>
       </p:sp>
       <p:sp>
         <p:nvSpPr>
@@ -15537,6 +15821,10 @@
           </a:solidFill>
           <a:ln/>
         </p:spPr>
+        <p:txBody>
+          <a:bodyPr/>
+          <a:p/>
+        </p:txBody>
       </p:sp>
       <p:sp>
         <p:nvSpPr>
@@ -15949,6 +16237,10 @@
           </a:solidFill>
           <a:ln/>
         </p:spPr>
+        <p:txBody>
+          <a:bodyPr/>
+          <a:p/>
+        </p:txBody>
       </p:sp>
       <p:sp>
         <p:nvSpPr>
@@ -16047,7 +16339,7 @@
                 <a:ea typeface="Calibri" pitchFamily="34" charset="-122"/>
                 <a:cs typeface="Calibri" pitchFamily="34" charset="-120"/>
               </a:rPr>
-              <a:t>Wessels: listas, tabelas e gráficos comunicam histórias diferentes dos dados.</a:t>
+              <a:t>Listas, tabelas e gráficos comunicam histórias diferentes dos dados.</a:t>
             </a:r>
             <a:endParaRPr lang="en-US" sz="1250" dirty="0"/>
           </a:p>
@@ -16068,7 +16360,7 @@
                 <a:ea typeface="Calibri" pitchFamily="34" charset="-122"/>
                 <a:cs typeface="Calibri" pitchFamily="34" charset="-120"/>
               </a:rPr>
-              <a:t>Queiroz: múltiplas expressões exibem aspectos distintos do mesmo conceito.</a:t>
+              <a:t>Múltiplas expressões exibem aspectos distintos do mesmo conceito.</a:t>
             </a:r>
             <a:endParaRPr lang="en-US" sz="1250" dirty="0"/>
           </a:p>
@@ -16089,7 +16381,7 @@
                 <a:ea typeface="Calibri" pitchFamily="34" charset="-122"/>
                 <a:cs typeface="Calibri" pitchFamily="34" charset="-120"/>
               </a:rPr>
-              <a:t>Relato: articular código, texto, tabela, gráfico e interpretação.</a:t>
+              <a:t>Articular código, texto, tabela, gráfico e interpretação.</a:t>
             </a:r>
             <a:endParaRPr lang="en-US" sz="1250" dirty="0"/>
           </a:p>
@@ -16116,6 +16408,10 @@
           </a:solidFill>
           <a:ln/>
         </p:spPr>
+        <p:txBody>
+          <a:bodyPr/>
+          <a:p/>
+        </p:txBody>
       </p:sp>
       <p:sp>
         <p:nvSpPr>
@@ -16383,6 +16679,10 @@
           </a:solidFill>
           <a:ln/>
         </p:spPr>
+        <p:txBody>
+          <a:bodyPr/>
+          <a:p/>
+        </p:txBody>
       </p:sp>
       <p:sp>
         <p:nvSpPr>
@@ -16483,6 +16783,10 @@
           </a:solidFill>
           <a:ln/>
         </p:spPr>
+        <p:txBody>
+          <a:bodyPr/>
+          <a:p/>
+        </p:txBody>
       </p:sp>
       <p:sp>
         <p:nvSpPr>
@@ -16629,6 +16933,10 @@
           </a:solidFill>
           <a:ln/>
         </p:spPr>
+        <p:txBody>
+          <a:bodyPr/>
+          <a:p/>
+        </p:txBody>
       </p:sp>
       <p:sp>
         <p:nvSpPr>
@@ -17342,6 +17650,10 @@
           </a:solidFill>
           <a:ln/>
         </p:spPr>
+        <p:txBody>
+          <a:bodyPr/>
+          <a:p/>
+        </p:txBody>
       </p:sp>
       <p:sp>
         <p:nvSpPr>
@@ -17440,7 +17752,7 @@
                 <a:ea typeface="Calibri" pitchFamily="34" charset="-122"/>
                 <a:cs typeface="Calibri" pitchFamily="34" charset="-120"/>
               </a:rPr>
-              <a:t>Wessels: listas, tabelas e gráficos comunicam histórias diferentes dos dados.</a:t>
+              <a:t>Listas, tabelas e gráficos comunicam histórias diferentes dos dados.</a:t>
             </a:r>
             <a:endParaRPr lang="en-US" sz="1250" dirty="0"/>
           </a:p>
@@ -17461,7 +17773,7 @@
                 <a:ea typeface="Calibri" pitchFamily="34" charset="-122"/>
                 <a:cs typeface="Calibri" pitchFamily="34" charset="-120"/>
               </a:rPr>
-              <a:t>Queiroz: representações ampliam a percepção de propriedades e relações.</a:t>
+              <a:t>Representações ampliam a percepção de propriedades e relações.</a:t>
             </a:r>
             <a:endParaRPr lang="en-US" sz="1250" dirty="0"/>
           </a:p>
@@ -17482,7 +17794,7 @@
                 <a:ea typeface="Calibri" pitchFamily="34" charset="-122"/>
                 <a:cs typeface="Calibri" pitchFamily="34" charset="-120"/>
               </a:rPr>
-              <a:t>Relato: articular código, texto, tabela, gráfico e interpretação.</a:t>
+              <a:t>Articular código, texto, tabela, gráfico e interpretação.</a:t>
             </a:r>
             <a:endParaRPr lang="en-US" sz="1250" dirty="0"/>
           </a:p>
@@ -17509,6 +17821,10 @@
           </a:solidFill>
           <a:ln/>
         </p:spPr>
+        <p:txBody>
+          <a:bodyPr/>
+          <a:p/>
+        </p:txBody>
       </p:sp>
       <p:sp>
         <p:nvSpPr>
@@ -17776,6 +18092,10 @@
           </a:solidFill>
           <a:ln/>
         </p:spPr>
+        <p:txBody>
+          <a:bodyPr/>
+          <a:p/>
+        </p:txBody>
       </p:sp>
       <p:sp>
         <p:nvSpPr>
@@ -17876,6 +18196,10 @@
           </a:solidFill>
           <a:ln/>
         </p:spPr>
+        <p:txBody>
+          <a:bodyPr/>
+          <a:p/>
+        </p:txBody>
       </p:sp>
       <p:sp>
         <p:nvSpPr>
@@ -18022,6 +18346,10 @@
           </a:solidFill>
           <a:ln/>
         </p:spPr>
+        <p:txBody>
+          <a:bodyPr/>
+          <a:p/>
+        </p:txBody>
       </p:sp>
       <p:sp>
         <p:nvSpPr>
@@ -18576,6 +18904,10 @@
           </a:solidFill>
           <a:ln/>
         </p:spPr>
+        <p:txBody>
+          <a:bodyPr/>
+          <a:p/>
+        </p:txBody>
       </p:sp>
       <p:sp>
         <p:nvSpPr>
@@ -18674,7 +19006,7 @@
                 <a:ea typeface="Calibri" pitchFamily="34" charset="-122"/>
                 <a:cs typeface="Calibri" pitchFamily="34" charset="-120"/>
               </a:rPr>
-              <a:t>Wessels: transnumeração torna dados interpretáveis em nova forma.</a:t>
+              <a:t>Transnumeração torna dados interpretáveis em nova forma.</a:t>
             </a:r>
             <a:endParaRPr lang="en-US" sz="1250" dirty="0"/>
           </a:p>
@@ -18695,7 +19027,7 @@
                 <a:ea typeface="Calibri" pitchFamily="34" charset="-122"/>
                 <a:cs typeface="Calibri" pitchFamily="34" charset="-120"/>
               </a:rPr>
-              <a:t>Queiroz: a análise qualitativa observa invariantes e relações mobilizadas na ação.</a:t>
+              <a:t>A análise qualitativa observa invariantes e relações mobilizadas na ação.</a:t>
             </a:r>
             <a:endParaRPr lang="en-US" sz="1250" dirty="0"/>
           </a:p>
@@ -18716,7 +19048,7 @@
                 <a:ea typeface="Calibri" pitchFamily="34" charset="-122"/>
                 <a:cs typeface="Calibri" pitchFamily="34" charset="-120"/>
               </a:rPr>
-              <a:t>Relato: explicitar variáveis, relações e restrições.</a:t>
+              <a:t>Explicitar variáveis, relações e restrições.</a:t>
             </a:r>
             <a:endParaRPr lang="en-US" sz="1250" dirty="0"/>
           </a:p>
@@ -18743,6 +19075,10 @@
           </a:solidFill>
           <a:ln/>
         </p:spPr>
+        <p:txBody>
+          <a:bodyPr/>
+          <a:p/>
+        </p:txBody>
       </p:sp>
       <p:sp>
         <p:nvSpPr>
